--- a/slides/Toan12/Slide_TOAN12_Bai2_T7-9.pptx
+++ b/slides/Toan12/Slide_TOAN12_Bai2_T7-9.pptx
@@ -3746,7 +3746,7 @@
                 </a:r>
                 <a:r>
                   <a:rPr lang="vi-VN"/>
-                  <a:t>y=(x+1)e^{-x}</a:t>
+                  <a:t>y=(x+1)e^{−x}</a:t>
                 </a:r>
                 <a:r>
                   <a:rPr sz="2400">
@@ -4514,7 +4514,7 @@
                 </a:r>
                 <a:r>
                   <a:rPr lang="vi-VN"/>
-                  <a:t>N(t)=-t^3+12t^2</a:t>
+                  <a:t>N(t)=−t^3+12t^2</a:t>
                 </a:r>
                 <a:r>
                   <a:rPr sz="2400" b="1">
@@ -6608,7 +6608,7 @@
                 </a:r>
                 <a:r>
                   <a:rPr lang="vi-VN"/>
-                  <a:t>f(x)=x^2-2x</a:t>
+                  <a:t>f(x)=x^2−2x</a:t>
                 </a:r>
                 <a:r>
                   <a:rPr sz="2400">
@@ -7795,7 +7795,7 @@
                 </a:r>
                 <a:r>
                   <a:rPr lang="vi-VN"/>
-                  <a:t>y=x-2+\frac{1}{x}</a:t>
+                  <a:t>y=x−2+\frac{1}{x}</a:t>
                 </a:r>
                 <a:r>
                   <a:rPr sz="2400" b="1">
@@ -7820,7 +7820,7 @@
                 </a:pPr>
                 <a:r>
                   <a:rPr lang="vi-VN"/>
-                  <a:t>y'=1-\frac{1}{x^2}=0\Leftrightarrow x=1</a:t>
+                  <a:t>y'=1−\frac{1}{x^2}=0\Leftrightarrow x=1</a:t>
                 </a:r>
               </a:p>
             </p:txBody>
@@ -9173,7 +9173,7 @@
                 </a:pPr>
                 <a:r>
                   <a:rPr lang="vi-VN"/>
-                  <a:t>y=x^4-4x^2+3</a:t>
+                  <a:t>y=x^4−4x^2+3</a:t>
                 </a:r>
                 <a:r>
                   <a:rPr sz="2400">
